--- a/reports/presentation_finale.pptx
+++ b/reports/presentation_finale.pptx
@@ -3242,7 +3242,7 @@
               <a:defRPr sz="1400"/>
             </a:pPr>
             <a:r>
-              <a:t>Cluster 1 : promo digitaux (42) — coupons web</a:t>
+              <a:t>Cluster 1 : promo digitaux (42) — coupons web + A/B test</a:t>
             </a:r>
           </a:p>
           <a:p>
@@ -3377,7 +3377,7 @@
               <a:defRPr sz="1400"/>
             </a:pPr>
             <a:r>
-              <a:t>Demo en ligne : Streamlit + Render</a:t>
+              <a:t>Docker + CI GitHub Actions + monitoring</a:t>
             </a:r>
           </a:p>
         </p:txBody>
@@ -3448,7 +3448,7 @@
               <a:defRPr sz="1400"/>
             </a:pPr>
             <a:r>
-              <a:t>Desequilibre extreme et split aleatoire (validation temporelle)</a:t>
+              <a:t>Dataset potentiellement tres separable — prudence en prod</a:t>
             </a:r>
           </a:p>
           <a:p>
@@ -3456,7 +3456,7 @@
               <a:defRPr sz="1400"/>
             </a:pPr>
             <a:r>
-              <a:t>Explicabilite SHAP et monitoring de derive</a:t>
+              <a:t>Validation temporelle complementaire realisee</a:t>
             </a:r>
           </a:p>
           <a:p>
@@ -3464,11 +3464,43 @@
               <a:defRPr sz="1400"/>
             </a:pPr>
             <a:r>
-              <a:t>MLflow, CI/CD, Docker pour la suite MLOps</a:t>
-            </a:r>
-          </a:p>
-        </p:txBody>
-      </p:sp>
+              <a:t>Protocole campagne cluster 1 documente</a:t>
+            </a:r>
+          </a:p>
+          <a:p>
+            <a:pPr>
+              <a:defRPr sz="1400"/>
+            </a:pPr>
+            <a:r>
+              <a:t>Suivi derive et recalibrage seuil avec le metier</a:t>
+            </a:r>
+          </a:p>
+        </p:txBody>
+      </p:sp>
+      <p:pic>
+        <p:nvPicPr>
+          <p:cNvPr id="4" name="Picture 3" descr="09_fraud_shap_summary.png"/>
+          <p:cNvPicPr>
+            <a:picLocks noChangeAspect="1"/>
+          </p:cNvPicPr>
+          <p:nvPr/>
+        </p:nvPicPr>
+        <p:blipFill>
+          <a:blip r:embed="rId2"/>
+          <a:stretch>
+            <a:fillRect/>
+          </a:stretch>
+        </p:blipFill>
+        <p:spPr>
+          <a:xfrm>
+            <a:off x="6217920" y="1280160"/>
+            <a:ext cx="2560320" cy="1544643"/>
+          </a:xfrm>
+          <a:prstGeom prst="rect">
+            <a:avLst/>
+          </a:prstGeom>
+        </p:spPr>
+      </p:pic>
     </p:spTree>
   </p:cSld>
   <p:clrMapOvr>
@@ -3915,7 +3947,15 @@
               <a:defRPr sz="1400"/>
             </a:pPr>
             <a:r>
-              <a:t>Split stratifie train/validation/test</a:t>
+              <a:t>Split stratifie + validation temporelle (step)</a:t>
+            </a:r>
+          </a:p>
+          <a:p>
+            <a:pPr>
+              <a:defRPr sz="1400"/>
+            </a:pPr>
+            <a:r>
+              <a:t>5 modeles : LogReg, RF, XGBoost, LightGBM, MLP</a:t>
             </a:r>
           </a:p>
           <a:p>
@@ -3986,7 +4026,7 @@
               <a:defRPr b="1" sz="1600"/>
             </a:pPr>
             <a:r>
-              <a:t>XGBoost retenu : meilleure PR-AUC (0,991).</a:t>
+              <a:t>XGBoost retenu : meilleure PR-AUC (0,990).</a:t>
             </a:r>
           </a:p>
           <a:p>
@@ -4002,7 +4042,7 @@
               <a:defRPr sz="1400"/>
             </a:pPr>
             <a:r>
-              <a:t>Random Forest : PR-AUC 0,986</a:t>
+              <a:t>Random Forest : PR-AUC 0,987</a:t>
             </a:r>
           </a:p>
           <a:p>
@@ -4010,7 +4050,15 @@
               <a:defRPr sz="1400"/>
             </a:pPr>
             <a:r>
-              <a:t>XGBoost : recall 0,983, precision 1,000, seuil 0,84</a:t>
+              <a:t>XGBoost : recall 98,3 %, precision 100 %, seuil 0,67</a:t>
+            </a:r>
+          </a:p>
+          <a:p>
+            <a:pPr>
+              <a:defRPr sz="1400"/>
+            </a:pPr>
+            <a:r>
+              <a:t>3 FN / 0 FP — analyse SHAP + chiffrage couts FP/FN</a:t>
             </a:r>
           </a:p>
         </p:txBody>
@@ -4113,7 +4161,7 @@
               <a:defRPr sz="1400"/>
             </a:pPr>
             <a:r>
-              <a:t>K-Means, Agglomerative, GMM testes (k=3 a 6)</a:t>
+              <a:t>K-Means, Agglomerative, GMM, DBSCAN (k=3 a 6)</a:t>
             </a:r>
           </a:p>
           <a:p>
@@ -4121,11 +4169,35 @@
               <a:defRPr sz="1400"/>
             </a:pPr>
             <a:r>
-              <a:t>Modele retenu : GMM k=4</a:t>
-            </a:r>
-          </a:p>
-        </p:txBody>
-      </p:sp>
+              <a:t>Modele retenu : GMM k=4 ; DBSCAN ecarte (91 % bruit)</a:t>
+            </a:r>
+          </a:p>
+        </p:txBody>
+      </p:sp>
+      <p:pic>
+        <p:nvPicPr>
+          <p:cNvPr id="4" name="Picture 3" descr="07_clustering_elbow.png"/>
+          <p:cNvPicPr>
+            <a:picLocks noChangeAspect="1"/>
+          </p:cNvPicPr>
+          <p:nvPr/>
+        </p:nvPicPr>
+        <p:blipFill>
+          <a:blip r:embed="rId2"/>
+          <a:stretch>
+            <a:fillRect/>
+          </a:stretch>
+        </p:blipFill>
+        <p:spPr>
+          <a:xfrm>
+            <a:off x="6217920" y="1280160"/>
+            <a:ext cx="2560320" cy="1481366"/>
+          </a:xfrm>
+          <a:prstGeom prst="rect">
+            <a:avLst/>
+          </a:prstGeom>
+        </p:spPr>
+      </p:pic>
     </p:spTree>
   </p:cSld>
   <p:clrMapOvr>
